--- a/HOTELFLOW.pptx
+++ b/HOTELFLOW.pptx
@@ -45168,7 +45168,35 @@
             <a:fillRect/>
           </a:stretch>
         </p:blipFill>
-        <p:spPr/>
+        <p:spPr>
+          <a:prstGeom prst="ellipse">
+            <a:avLst/>
+          </a:prstGeom>
+          <a:ln w="63500" cap="rnd">
+            <a:solidFill>
+              <a:srgbClr val="333333"/>
+            </a:solidFill>
+          </a:ln>
+          <a:effectLst>
+            <a:outerShdw blurRad="381000" dist="292100" dir="5400000" sx="-80000" sy="-18000" rotWithShape="0">
+              <a:srgbClr val="000000">
+                <a:alpha val="22000"/>
+              </a:srgbClr>
+            </a:outerShdw>
+          </a:effectLst>
+          <a:scene3d>
+            <a:camera prst="orthographicFront"/>
+            <a:lightRig rig="contrasting" dir="t">
+              <a:rot lat="0" lon="0" rev="3000000"/>
+            </a:lightRig>
+          </a:scene3d>
+          <a:sp3d contourW="7620">
+            <a:bevelT w="95250" h="31750"/>
+            <a:contourClr>
+              <a:srgbClr val="333333"/>
+            </a:contourClr>
+          </a:sp3d>
+        </p:spPr>
       </p:pic>
       <p:sp>
         <p:nvSpPr>
